--- a/Doc Slide/Presentation_du_27_01.pptx
+++ b/Doc Slide/Presentation_du_27_01.pptx
@@ -4418,6 +4418,37 @@
         <a:lstStyle/>
         <a:p>
           <a:r>
+            <a:rPr lang="fr-FR" sz="1400" kern="1200" dirty="0">
+              <a:solidFill>
+                <a:prstClr val="black">
+                  <a:hueOff val="0"/>
+                  <a:satOff val="0"/>
+                  <a:lumOff val="0"/>
+                  <a:alphaOff val="0"/>
+                </a:prstClr>
+              </a:solidFill>
+              <a:latin typeface="Aptos" panose="02110004020202020204"/>
+              <a:ea typeface="+mn-ea"/>
+              <a:cs typeface="+mn-cs"/>
+            </a:rPr>
+            <a:t>La </a:t>
+          </a:r>
+          <a:r>
+            <a:rPr lang="es-AR" sz="1400" b="0" i="0" kern="1200" dirty="0" err="1"/>
+            <a:t>détection</a:t>
+          </a:r>
+          <a:r>
+            <a:rPr lang="es-AR" sz="1400" b="0" i="0" kern="1200" dirty="0"/>
+            <a:t> </a:t>
+          </a:r>
+          <a:r>
+            <a:rPr lang="es-AR" sz="1400" b="0" i="0" kern="1200" dirty="0" err="1"/>
+            <a:t>d'objets</a:t>
+          </a:r>
+          <a:endParaRPr lang="es-AR" sz="1400" b="0" i="0" kern="1200" dirty="0"/>
+        </a:p>
+        <a:p>
+          <a:r>
             <a:rPr lang="fr-FR" sz="1400" kern="1200" dirty="0" err="1">
               <a:solidFill>
                 <a:prstClr val="black">
@@ -4447,7 +4478,7 @@
               <a:ea typeface="+mn-ea"/>
               <a:cs typeface="+mn-cs"/>
             </a:rPr>
-            <a:t> et Vidéo/Images</a:t>
+            <a:t> Vidéo Radar</a:t>
           </a:r>
           <a:endParaRPr lang="en-US" sz="1400" kern="1200" dirty="0"/>
         </a:p>
@@ -4523,10 +4554,23 @@
         <a:lstStyle/>
         <a:p>
           <a:r>
-            <a:rPr lang="fr-FR"/>
-            <a:t>Détection des cancers / annotations d’images</a:t>
+            <a:rPr lang="fr-FR" dirty="0"/>
+            <a:t>Détection des cancers</a:t>
           </a:r>
-          <a:endParaRPr lang="en-US"/>
+        </a:p>
+        <a:p>
+          <a:r>
+            <a:rPr lang="en-US" dirty="0"/>
+            <a:t>Image </a:t>
+          </a:r>
+          <a:r>
+            <a:rPr lang="en-US" dirty="0" err="1"/>
+            <a:t>texte</a:t>
+          </a:r>
+          <a:r>
+            <a:rPr lang="en-US" dirty="0"/>
+            <a:t> </a:t>
+          </a:r>
         </a:p>
       </dgm:t>
     </dgm:pt>
@@ -4601,7 +4645,7 @@
         <a:p>
           <a:r>
             <a:rPr lang="fr-FR" dirty="0"/>
-            <a:t>Photo + texte</a:t>
+            <a:t>Image texte</a:t>
           </a:r>
           <a:endParaRPr lang="en-US" dirty="0"/>
         </a:p>
@@ -4640,10 +4684,10 @@
             <a:defRPr b="1"/>
           </a:pPr>
           <a:r>
-            <a:rPr lang="fr-FR"/>
+            <a:rPr lang="fr-FR" dirty="0"/>
             <a:t>Analyse de sentiments</a:t>
           </a:r>
-          <a:endParaRPr lang="en-US"/>
+          <a:endParaRPr lang="en-US" dirty="0"/>
         </a:p>
       </dgm:t>
     </dgm:pt>
@@ -6682,7 +6726,7 @@
       </dsp:nvSpPr>
       <dsp:spPr>
         <a:xfrm>
-          <a:off x="788484" y="991077"/>
+          <a:off x="788484" y="950544"/>
           <a:ext cx="844593" cy="844593"/>
         </a:xfrm>
         <a:prstGeom prst="rect">
@@ -6732,7 +6776,7 @@
       </dsp:nvSpPr>
       <dsp:spPr>
         <a:xfrm>
-          <a:off x="4219" y="1909082"/>
+          <a:off x="4219" y="1872035"/>
           <a:ext cx="2413125" cy="361968"/>
         </a:xfrm>
         <a:prstGeom prst="rect">
@@ -6783,7 +6827,7 @@
         </a:p>
       </dsp:txBody>
       <dsp:txXfrm>
-        <a:off x="4219" y="1909082"/>
+        <a:off x="4219" y="1872035"/>
         <a:ext cx="2413125" cy="361968"/>
       </dsp:txXfrm>
     </dsp:sp>
@@ -6794,8 +6838,8 @@
       </dsp:nvSpPr>
       <dsp:spPr>
         <a:xfrm>
-          <a:off x="4219" y="2305196"/>
-          <a:ext cx="2413125" cy="393131"/>
+          <a:off x="4219" y="2269770"/>
+          <a:ext cx="2413125" cy="469090"/>
         </a:xfrm>
         <a:prstGeom prst="rect">
           <a:avLst/>
@@ -6823,6 +6867,49 @@
           <a:noAutofit/>
         </a:bodyPr>
         <a:lstStyle/>
+        <a:p>
+          <a:pPr marL="0" lvl="0" indent="0" algn="ctr" defTabSz="622300">
+            <a:lnSpc>
+              <a:spcPct val="90000"/>
+            </a:lnSpc>
+            <a:spcBef>
+              <a:spcPct val="0"/>
+            </a:spcBef>
+            <a:spcAft>
+              <a:spcPct val="35000"/>
+            </a:spcAft>
+            <a:buNone/>
+          </a:pPr>
+          <a:r>
+            <a:rPr lang="fr-FR" sz="1400" kern="1200" dirty="0">
+              <a:solidFill>
+                <a:prstClr val="black">
+                  <a:hueOff val="0"/>
+                  <a:satOff val="0"/>
+                  <a:lumOff val="0"/>
+                  <a:alphaOff val="0"/>
+                </a:prstClr>
+              </a:solidFill>
+              <a:latin typeface="Aptos" panose="02110004020202020204"/>
+              <a:ea typeface="+mn-ea"/>
+              <a:cs typeface="+mn-cs"/>
+            </a:rPr>
+            <a:t>La </a:t>
+          </a:r>
+          <a:r>
+            <a:rPr lang="es-AR" sz="1400" b="0" i="0" kern="1200" dirty="0" err="1"/>
+            <a:t>détection</a:t>
+          </a:r>
+          <a:r>
+            <a:rPr lang="es-AR" sz="1400" b="0" i="0" kern="1200" dirty="0"/>
+            <a:t> </a:t>
+          </a:r>
+          <a:r>
+            <a:rPr lang="es-AR" sz="1400" b="0" i="0" kern="1200" dirty="0" err="1"/>
+            <a:t>d'objets</a:t>
+          </a:r>
+          <a:endParaRPr lang="es-AR" sz="1400" b="0" i="0" kern="1200" dirty="0"/>
+        </a:p>
         <a:p>
           <a:pPr marL="0" lvl="0" indent="0" algn="ctr" defTabSz="622300">
             <a:lnSpc>
@@ -6866,14 +6953,14 @@
               <a:ea typeface="+mn-ea"/>
               <a:cs typeface="+mn-cs"/>
             </a:rPr>
-            <a:t> et Vidéo/Images</a:t>
+            <a:t> Vidéo Radar</a:t>
           </a:r>
           <a:endParaRPr lang="en-US" sz="1400" kern="1200" dirty="0"/>
         </a:p>
       </dsp:txBody>
       <dsp:txXfrm>
-        <a:off x="4219" y="2305196"/>
-        <a:ext cx="2413125" cy="393131"/>
+        <a:off x="4219" y="2269770"/>
+        <a:ext cx="2413125" cy="469090"/>
       </dsp:txXfrm>
     </dsp:sp>
     <dsp:sp modelId="{60342116-F6C5-4B11-A6F0-506B9648470D}">
@@ -6883,7 +6970,7 @@
       </dsp:nvSpPr>
       <dsp:spPr>
         <a:xfrm>
-          <a:off x="3623906" y="991077"/>
+          <a:off x="3623906" y="950544"/>
           <a:ext cx="844593" cy="844593"/>
         </a:xfrm>
         <a:prstGeom prst="rect">
@@ -6933,7 +7020,7 @@
       </dsp:nvSpPr>
       <dsp:spPr>
         <a:xfrm>
-          <a:off x="2839641" y="1909082"/>
+          <a:off x="2839641" y="1872035"/>
           <a:ext cx="2413125" cy="361968"/>
         </a:xfrm>
         <a:prstGeom prst="rect">
@@ -6984,7 +7071,7 @@
         </a:p>
       </dsp:txBody>
       <dsp:txXfrm>
-        <a:off x="2839641" y="1909082"/>
+        <a:off x="2839641" y="1872035"/>
         <a:ext cx="2413125" cy="361968"/>
       </dsp:txXfrm>
     </dsp:sp>
@@ -6995,8 +7082,8 @@
       </dsp:nvSpPr>
       <dsp:spPr>
         <a:xfrm>
-          <a:off x="2839641" y="2305196"/>
-          <a:ext cx="2413125" cy="393131"/>
+          <a:off x="2839641" y="2269770"/>
+          <a:ext cx="2413125" cy="469090"/>
         </a:xfrm>
         <a:prstGeom prst="rect">
           <a:avLst/>
@@ -7038,15 +7125,40 @@
             <a:buNone/>
           </a:pPr>
           <a:r>
-            <a:rPr lang="fr-FR" sz="1400" kern="1200"/>
-            <a:t>Détection des cancers / annotations d’images</a:t>
+            <a:rPr lang="fr-FR" sz="1400" kern="1200" dirty="0"/>
+            <a:t>Détection des cancers</a:t>
           </a:r>
-          <a:endParaRPr lang="en-US" sz="1400" kern="1200"/>
+        </a:p>
+        <a:p>
+          <a:pPr marL="0" lvl="0" indent="0" algn="ctr" defTabSz="622300">
+            <a:lnSpc>
+              <a:spcPct val="90000"/>
+            </a:lnSpc>
+            <a:spcBef>
+              <a:spcPct val="0"/>
+            </a:spcBef>
+            <a:spcAft>
+              <a:spcPct val="35000"/>
+            </a:spcAft>
+            <a:buNone/>
+          </a:pPr>
+          <a:r>
+            <a:rPr lang="en-US" sz="1400" kern="1200" dirty="0"/>
+            <a:t>Image </a:t>
+          </a:r>
+          <a:r>
+            <a:rPr lang="en-US" sz="1400" kern="1200" dirty="0" err="1"/>
+            <a:t>texte</a:t>
+          </a:r>
+          <a:r>
+            <a:rPr lang="en-US" sz="1400" kern="1200" dirty="0"/>
+            <a:t> </a:t>
+          </a:r>
         </a:p>
       </dsp:txBody>
       <dsp:txXfrm>
-        <a:off x="2839641" y="2305196"/>
-        <a:ext cx="2413125" cy="393131"/>
+        <a:off x="2839641" y="2269770"/>
+        <a:ext cx="2413125" cy="469090"/>
       </dsp:txXfrm>
     </dsp:sp>
     <dsp:sp modelId="{6EF7DE9F-65B9-45C5-8268-6F1EB7BF6F3F}">
@@ -7056,7 +7168,7 @@
       </dsp:nvSpPr>
       <dsp:spPr>
         <a:xfrm>
-          <a:off x="6459328" y="991077"/>
+          <a:off x="6459328" y="950544"/>
           <a:ext cx="844593" cy="844593"/>
         </a:xfrm>
         <a:prstGeom prst="rect">
@@ -7106,7 +7218,7 @@
       </dsp:nvSpPr>
       <dsp:spPr>
         <a:xfrm>
-          <a:off x="5675062" y="1909082"/>
+          <a:off x="5675062" y="1872035"/>
           <a:ext cx="2413125" cy="361968"/>
         </a:xfrm>
         <a:prstGeom prst="rect">
@@ -7157,7 +7269,7 @@
         </a:p>
       </dsp:txBody>
       <dsp:txXfrm>
-        <a:off x="5675062" y="1909082"/>
+        <a:off x="5675062" y="1872035"/>
         <a:ext cx="2413125" cy="361968"/>
       </dsp:txXfrm>
     </dsp:sp>
@@ -7168,8 +7280,8 @@
       </dsp:nvSpPr>
       <dsp:spPr>
         <a:xfrm>
-          <a:off x="5675062" y="2305196"/>
-          <a:ext cx="2413125" cy="393131"/>
+          <a:off x="5675062" y="2269770"/>
+          <a:ext cx="2413125" cy="469090"/>
         </a:xfrm>
         <a:prstGeom prst="rect">
           <a:avLst/>
@@ -7212,14 +7324,14 @@
           </a:pPr>
           <a:r>
             <a:rPr lang="fr-FR" sz="1400" kern="1200" dirty="0"/>
-            <a:t>Photo + texte</a:t>
+            <a:t>Image texte</a:t>
           </a:r>
           <a:endParaRPr lang="en-US" sz="1400" kern="1200" dirty="0"/>
         </a:p>
       </dsp:txBody>
       <dsp:txXfrm>
-        <a:off x="5675062" y="2305196"/>
-        <a:ext cx="2413125" cy="393131"/>
+        <a:off x="5675062" y="2269770"/>
+        <a:ext cx="2413125" cy="469090"/>
       </dsp:txXfrm>
     </dsp:sp>
     <dsp:sp modelId="{E717C28D-5F83-497D-8E4B-642D28C9CCE8}">
@@ -7229,7 +7341,7 @@
       </dsp:nvSpPr>
       <dsp:spPr>
         <a:xfrm>
-          <a:off x="9294750" y="991077"/>
+          <a:off x="9294750" y="950544"/>
           <a:ext cx="844593" cy="844593"/>
         </a:xfrm>
         <a:prstGeom prst="rect">
@@ -7279,7 +7391,7 @@
       </dsp:nvSpPr>
       <dsp:spPr>
         <a:xfrm>
-          <a:off x="8510484" y="1909082"/>
+          <a:off x="8510484" y="1872035"/>
           <a:ext cx="2413125" cy="361968"/>
         </a:xfrm>
         <a:prstGeom prst="rect">
@@ -7323,14 +7435,14 @@
             <a:defRPr b="1"/>
           </a:pPr>
           <a:r>
-            <a:rPr lang="fr-FR" sz="1800" kern="1200"/>
+            <a:rPr lang="fr-FR" sz="1800" kern="1200" dirty="0"/>
             <a:t>Analyse de sentiments</a:t>
           </a:r>
-          <a:endParaRPr lang="en-US" sz="1800" kern="1200"/>
+          <a:endParaRPr lang="en-US" sz="1800" kern="1200" dirty="0"/>
         </a:p>
       </dsp:txBody>
       <dsp:txXfrm>
-        <a:off x="8510484" y="1909082"/>
+        <a:off x="8510484" y="1872035"/>
         <a:ext cx="2413125" cy="361968"/>
       </dsp:txXfrm>
     </dsp:sp>
@@ -7341,8 +7453,8 @@
       </dsp:nvSpPr>
       <dsp:spPr>
         <a:xfrm>
-          <a:off x="8510484" y="2305196"/>
-          <a:ext cx="2413125" cy="393131"/>
+          <a:off x="8510484" y="2269770"/>
+          <a:ext cx="2413125" cy="469090"/>
         </a:xfrm>
         <a:prstGeom prst="rect">
           <a:avLst/>
@@ -7395,8 +7507,8 @@
         </a:p>
       </dsp:txBody>
       <dsp:txXfrm>
-        <a:off x="8510484" y="2305196"/>
-        <a:ext cx="2413125" cy="393131"/>
+        <a:off x="8510484" y="2269770"/>
+        <a:ext cx="2413125" cy="469090"/>
       </dsp:txXfrm>
     </dsp:sp>
   </dsp:spTree>
@@ -16076,7 +16188,7 @@
           <a:p>
             <a:fld id="{BFD1E85C-B242-45CA-A591-1CB75F4C12E8}" type="datetimeFigureOut">
               <a:rPr lang="fr-FR" smtClean="0"/>
-              <a:t>26/01/2026</a:t>
+              <a:t>27/01/2026</a:t>
             </a:fld>
             <a:endParaRPr lang="fr-FR"/>
           </a:p>
@@ -16705,15 +16817,6 @@
             <a:endParaRPr lang="fr-FR" dirty="0"/>
           </a:p>
           <a:p>
-            <a:r>
-              <a:rPr lang="fr-FR" dirty="0"/>
-              <a:t>se concentre sur l’intégration et l’interprétation d’informations provenant de différentes modalités, telles que le texte, les images, l’audio ou la vidéo, en les projetant dans un espace latent partagé.</a:t>
-            </a:r>
-          </a:p>
-          <a:p>
-            <a:endParaRPr lang="fr-FR" dirty="0"/>
-          </a:p>
-          <a:p>
             <a:pPr marL="0" indent="0">
               <a:buNone/>
             </a:pPr>
@@ -18457,9 +18560,62 @@
               <a:rPr lang="es-AR" b="1" dirty="0"/>
               <a:t> :</a:t>
             </a:r>
+          </a:p>
+          <a:p>
+            <a:endParaRPr lang="es-AR" b="1" dirty="0"/>
+          </a:p>
+          <a:p>
+            <a:r>
+              <a:rPr lang="es-AR" b="1" dirty="0" err="1"/>
+              <a:t>Automatique</a:t>
+            </a:r>
+            <a:r>
+              <a:rPr lang="es-AR" b="1" dirty="0"/>
+              <a:t> </a:t>
+            </a:r>
+          </a:p>
+          <a:p>
+            <a:r>
+              <a:rPr lang="es-AR" b="1" dirty="0"/>
+              <a:t>OU et  QUAND </a:t>
+            </a:r>
+          </a:p>
+          <a:p>
+            <a:r>
+              <a:rPr lang="es-AR" b="1" dirty="0" err="1"/>
+              <a:t>Maximiser</a:t>
+            </a:r>
+            <a:r>
+              <a:rPr lang="es-AR" b="1" dirty="0"/>
+              <a:t> les </a:t>
+            </a:r>
+            <a:r>
+              <a:rPr lang="es-AR" b="1" dirty="0" err="1"/>
+              <a:t>perf</a:t>
+            </a:r>
+            <a:r>
+              <a:rPr lang="es-AR" b="1" dirty="0"/>
+              <a:t> mini </a:t>
+            </a:r>
+            <a:r>
+              <a:rPr lang="es-AR" b="1" dirty="0" err="1"/>
+              <a:t>perte</a:t>
+            </a:r>
+            <a:r>
+              <a:rPr lang="es-AR" b="1" dirty="0"/>
+              <a:t> </a:t>
+            </a:r>
+            <a:r>
+              <a:rPr lang="es-AR" b="1" dirty="0" err="1"/>
+              <a:t>information</a:t>
+            </a:r>
             <a:endParaRPr lang="es-AR" dirty="0"/>
           </a:p>
           <a:p>
+            <a:pPr marL="171450" indent="-171450">
+              <a:buFont typeface="Arial" panose="020B0604020202020204" pitchFamily="34" charset="0"/>
+              <a:buChar char="•"/>
+            </a:pPr>
             <a:r>
               <a:rPr lang="fr-FR" dirty="0"/>
               <a:t>Recherche automatique d’une architecture de réseau </a:t>
@@ -18474,6 +18630,10 @@
             </a:r>
           </a:p>
           <a:p>
+            <a:pPr marL="171450" indent="-171450">
+              <a:buFont typeface="Arial" panose="020B0604020202020204" pitchFamily="34" charset="0"/>
+              <a:buChar char="•"/>
+            </a:pPr>
             <a:r>
               <a:rPr lang="fr-FR" dirty="0"/>
               <a:t>Identification du </a:t>
@@ -18512,6 +18672,10 @@
             </a:r>
           </a:p>
           <a:p>
+            <a:pPr marL="171450" indent="-171450">
+              <a:buFont typeface="Arial" panose="020B0604020202020204" pitchFamily="34" charset="0"/>
+              <a:buChar char="•"/>
+            </a:pPr>
             <a:r>
               <a:rPr lang="fr-FR" dirty="0"/>
               <a:t>Objectif : </a:t>
@@ -19477,7 +19641,10 @@
             </a:r>
           </a:p>
           <a:p>
-            <a:endParaRPr lang="fr-FR" dirty="0"/>
+            <a:r>
+              <a:rPr lang="fr-FR" dirty="0"/>
+              <a:t> </a:t>
+            </a:r>
           </a:p>
           <a:p>
             <a:r>
@@ -19486,15 +19653,15 @@
             </a:r>
             <a:r>
               <a:rPr lang="fr-FR" dirty="0"/>
-              <a:t> associer les observations multimodales en comparant leurs </a:t>
-            </a:r>
-            <a:r>
-              <a:rPr lang="fr-FR" dirty="0" err="1"/>
-              <a:t>features</a:t>
+              <a:t> retrouvant la </a:t>
+            </a:r>
+            <a:r>
+              <a:rPr lang="fr-FR" b="1" dirty="0"/>
+              <a:t>meilleure correspondance temporelle  </a:t>
             </a:r>
             <a:r>
               <a:rPr lang="fr-FR" dirty="0"/>
-              <a:t> (spatial, temporel, sémantique) afin d’aligner “qui correspond à quoi”.</a:t>
+              <a:t>“je trouve ce qui correspond le mieux dans le temps et l’espace”</a:t>
             </a:r>
             <a:br>
               <a:rPr lang="fr-FR" dirty="0"/>
@@ -19505,7 +19672,7 @@
             </a:r>
             <a:r>
               <a:rPr lang="fr-FR" dirty="0"/>
-              <a:t> ajouter une structure logique (entités + relations) pour réduire les ambiguïtés et valider les correspondances par cohérence sémantique.</a:t>
+              <a:t> “ vérifie que cette correspondance est logique et cohérente”</a:t>
             </a:r>
           </a:p>
         </p:txBody>
@@ -19543,6 +19710,90 @@
     <p:extLst>
       <p:ext uri="{BB962C8B-B14F-4D97-AF65-F5344CB8AC3E}">
         <p14:creationId xmlns:p14="http://schemas.microsoft.com/office/powerpoint/2010/main" val="703877343"/>
+      </p:ext>
+    </p:extLst>
+  </p:cSld>
+  <p:clrMapOvr>
+    <a:masterClrMapping/>
+  </p:clrMapOvr>
+</p:notes>
+</file>
+
+<file path=ppt/notesSlides/notesSlide26.xml><?xml version="1.0" encoding="utf-8"?>
+<p:notes xmlns:a="http://schemas.openxmlformats.org/drawingml/2006/main" xmlns:r="http://schemas.openxmlformats.org/officeDocument/2006/relationships" xmlns:p="http://schemas.openxmlformats.org/presentationml/2006/main">
+  <p:cSld>
+    <p:spTree>
+      <p:nvGrpSpPr>
+        <p:cNvPr id="1" name=""/>
+        <p:cNvGrpSpPr/>
+        <p:nvPr/>
+      </p:nvGrpSpPr>
+      <p:grpSpPr>
+        <a:xfrm>
+          <a:off x="0" y="0"/>
+          <a:ext cx="0" cy="0"/>
+          <a:chOff x="0" y="0"/>
+          <a:chExt cx="0" cy="0"/>
+        </a:xfrm>
+      </p:grpSpPr>
+      <p:sp>
+        <p:nvSpPr>
+          <p:cNvPr id="2" name="Espace réservé de l'image des diapositives 1"/>
+          <p:cNvSpPr>
+            <a:spLocks noGrp="1" noRot="1" noChangeAspect="1"/>
+          </p:cNvSpPr>
+          <p:nvPr>
+            <p:ph type="sldImg"/>
+          </p:nvPr>
+        </p:nvSpPr>
+        <p:spPr/>
+      </p:sp>
+      <p:sp>
+        <p:nvSpPr>
+          <p:cNvPr id="3" name="Espace réservé des notes 2"/>
+          <p:cNvSpPr>
+            <a:spLocks noGrp="1"/>
+          </p:cNvSpPr>
+          <p:nvPr>
+            <p:ph type="body" idx="1"/>
+          </p:nvPr>
+        </p:nvSpPr>
+        <p:spPr/>
+        <p:txBody>
+          <a:bodyPr/>
+          <a:lstStyle/>
+          <a:p>
+            <a:endParaRPr lang="es-AR" dirty="0"/>
+          </a:p>
+        </p:txBody>
+      </p:sp>
+      <p:sp>
+        <p:nvSpPr>
+          <p:cNvPr id="4" name="Espace réservé du numéro de diapositive 3"/>
+          <p:cNvSpPr>
+            <a:spLocks noGrp="1"/>
+          </p:cNvSpPr>
+          <p:nvPr>
+            <p:ph type="sldNum" sz="quarter" idx="5"/>
+          </p:nvPr>
+        </p:nvSpPr>
+        <p:spPr/>
+        <p:txBody>
+          <a:bodyPr/>
+          <a:lstStyle/>
+          <a:p>
+            <a:fld id="{61639CAE-AB21-4710-80C8-BF7B7344CF34}" type="slidenum">
+              <a:rPr lang="fr-FR" smtClean="0"/>
+              <a:t>29</a:t>
+            </a:fld>
+            <a:endParaRPr lang="fr-FR"/>
+          </a:p>
+        </p:txBody>
+      </p:sp>
+    </p:spTree>
+    <p:extLst>
+      <p:ext uri="{BB962C8B-B14F-4D97-AF65-F5344CB8AC3E}">
+        <p14:creationId xmlns:p14="http://schemas.microsoft.com/office/powerpoint/2010/main" val="1792291736"/>
       </p:ext>
     </p:extLst>
   </p:cSld>
@@ -20237,7 +20488,10 @@
           <a:bodyPr/>
           <a:lstStyle/>
           <a:p>
-            <a:endParaRPr lang="fr-FR" dirty="0"/>
+            <a:r>
+              <a:rPr lang="fr-FR" dirty="0"/>
+              <a:t>Imagerie </a:t>
+            </a:r>
           </a:p>
         </p:txBody>
       </p:sp>
@@ -21135,7 +21389,7 @@
           <a:p>
             <a:fld id="{11F52F01-F947-41D9-BA07-76A29AF3FB3C}" type="datetime1">
               <a:rPr lang="fr-FR" smtClean="0"/>
-              <a:t>26/01/2026</a:t>
+              <a:t>27/01/2026</a:t>
             </a:fld>
             <a:endParaRPr lang="fr-FR"/>
           </a:p>
@@ -21333,7 +21587,7 @@
           <a:p>
             <a:fld id="{FE6FA391-0CE9-40D0-A2F7-85DBD7240798}" type="datetime1">
               <a:rPr lang="fr-FR" smtClean="0"/>
-              <a:t>26/01/2026</a:t>
+              <a:t>27/01/2026</a:t>
             </a:fld>
             <a:endParaRPr lang="fr-FR"/>
           </a:p>
@@ -21541,7 +21795,7 @@
           <a:p>
             <a:fld id="{81B1AECE-E014-45BC-B18F-7BDB4D69CDE5}" type="datetime1">
               <a:rPr lang="fr-FR" smtClean="0"/>
-              <a:t>26/01/2026</a:t>
+              <a:t>27/01/2026</a:t>
             </a:fld>
             <a:endParaRPr lang="fr-FR"/>
           </a:p>
@@ -21739,7 +21993,7 @@
           <a:p>
             <a:fld id="{76421966-8986-482C-90C2-62BF1A11D36D}" type="datetime1">
               <a:rPr lang="fr-FR" smtClean="0"/>
-              <a:t>26/01/2026</a:t>
+              <a:t>27/01/2026</a:t>
             </a:fld>
             <a:endParaRPr lang="fr-FR"/>
           </a:p>
@@ -22014,7 +22268,7 @@
           <a:p>
             <a:fld id="{E4A31AD7-4506-4F25-A60F-0300DAE3D063}" type="datetime1">
               <a:rPr lang="fr-FR" smtClean="0"/>
-              <a:t>26/01/2026</a:t>
+              <a:t>27/01/2026</a:t>
             </a:fld>
             <a:endParaRPr lang="fr-FR"/>
           </a:p>
@@ -22279,7 +22533,7 @@
           <a:p>
             <a:fld id="{FDC9F305-6BE9-477E-B049-8DB9C44E0473}" type="datetime1">
               <a:rPr lang="fr-FR" smtClean="0"/>
-              <a:t>26/01/2026</a:t>
+              <a:t>27/01/2026</a:t>
             </a:fld>
             <a:endParaRPr lang="fr-FR"/>
           </a:p>
@@ -22691,7 +22945,7 @@
           <a:p>
             <a:fld id="{2BE00478-2532-4426-A347-BBB69087F0B3}" type="datetime1">
               <a:rPr lang="fr-FR" smtClean="0"/>
-              <a:t>26/01/2026</a:t>
+              <a:t>27/01/2026</a:t>
             </a:fld>
             <a:endParaRPr lang="fr-FR"/>
           </a:p>
@@ -22832,7 +23086,7 @@
           <a:p>
             <a:fld id="{08B6C776-B065-4BFE-A3E9-F437B6796D90}" type="datetime1">
               <a:rPr lang="fr-FR" smtClean="0"/>
-              <a:t>26/01/2026</a:t>
+              <a:t>27/01/2026</a:t>
             </a:fld>
             <a:endParaRPr lang="fr-FR"/>
           </a:p>
@@ -22945,7 +23199,7 @@
           <a:p>
             <a:fld id="{085604E2-3368-4A8D-80EB-F1000403030A}" type="datetime1">
               <a:rPr lang="fr-FR" smtClean="0"/>
-              <a:t>26/01/2026</a:t>
+              <a:t>27/01/2026</a:t>
             </a:fld>
             <a:endParaRPr lang="fr-FR"/>
           </a:p>
@@ -23256,7 +23510,7 @@
           <a:p>
             <a:fld id="{D4EEA691-572F-4F04-BC85-BD56FDB68B16}" type="datetime1">
               <a:rPr lang="fr-FR" smtClean="0"/>
-              <a:t>26/01/2026</a:t>
+              <a:t>27/01/2026</a:t>
             </a:fld>
             <a:endParaRPr lang="fr-FR"/>
           </a:p>
@@ -23544,7 +23798,7 @@
           <a:p>
             <a:fld id="{F51E280F-F899-4FD0-A249-C2535D392737}" type="datetime1">
               <a:rPr lang="fr-FR" smtClean="0"/>
-              <a:t>26/01/2026</a:t>
+              <a:t>27/01/2026</a:t>
             </a:fld>
             <a:endParaRPr lang="fr-FR"/>
           </a:p>
@@ -23785,7 +24039,7 @@
           <a:p>
             <a:fld id="{34449E18-1044-428F-89F4-DDEB76B54A54}" type="datetime1">
               <a:rPr lang="fr-FR" smtClean="0"/>
-              <a:t>26/01/2026</a:t>
+              <a:t>27/01/2026</a:t>
             </a:fld>
             <a:endParaRPr lang="fr-FR"/>
           </a:p>
@@ -24957,54 +25211,22 @@
           </a:p>
           <a:p>
             <a:r>
-              <a:rPr lang="fr-FR" dirty="0" err="1">
-                <a:solidFill>
-                  <a:schemeClr val="bg1"/>
-                </a:solidFill>
-              </a:rPr>
-              <a:t>Esaip</a:t>
-            </a:r>
-            <a:r>
               <a:rPr lang="fr-FR" dirty="0">
                 <a:solidFill>
                   <a:schemeClr val="bg1"/>
                 </a:solidFill>
               </a:rPr>
-              <a:t> Angers</a:t>
-            </a:r>
-          </a:p>
-          <a:p>
-            <a:r>
-              <a:rPr lang="fr-FR" dirty="0" err="1">
-                <a:solidFill>
-                  <a:schemeClr val="bg1"/>
-                </a:solidFill>
-              </a:rPr>
-              <a:t>Periode</a:t>
-            </a:r>
+              <a:t>ESAIP Angers</a:t>
+            </a:r>
+          </a:p>
+          <a:p>
             <a:r>
               <a:rPr lang="fr-FR" dirty="0">
                 <a:solidFill>
                   <a:schemeClr val="bg1"/>
                 </a:solidFill>
               </a:rPr>
-              <a:t> de stage: septembre 2025 / </a:t>
-            </a:r>
-            <a:r>
-              <a:rPr lang="fr-FR" dirty="0" err="1">
-                <a:solidFill>
-                  <a:schemeClr val="bg1"/>
-                </a:solidFill>
-              </a:rPr>
-              <a:t>Fevrier</a:t>
-            </a:r>
-            <a:r>
-              <a:rPr lang="fr-FR" dirty="0">
-                <a:solidFill>
-                  <a:schemeClr val="bg1"/>
-                </a:solidFill>
-              </a:rPr>
-              <a:t> 2026</a:t>
+              <a:t>Période de stage : septembre 2025 - février 2026</a:t>
             </a:r>
           </a:p>
         </p:txBody>
@@ -25387,7 +25609,7 @@
                 <a:ea typeface="+mj-ea"/>
                 <a:cs typeface="+mj-cs"/>
               </a:rPr>
-              <a:t>Early  Fusion</a:t>
+              <a:t>Early Fusion</a:t>
             </a:r>
           </a:p>
         </p:txBody>
@@ -25835,7 +26057,7 @@
                 <a:ea typeface="+mj-ea"/>
                 <a:cs typeface="+mj-cs"/>
               </a:rPr>
-              <a:t>Deep  Fusion</a:t>
+              <a:t>Deep Fusion</a:t>
             </a:r>
           </a:p>
         </p:txBody>
@@ -26283,7 +26505,7 @@
                 <a:ea typeface="+mj-ea"/>
                 <a:cs typeface="+mj-cs"/>
               </a:rPr>
-              <a:t>Late  Fusion</a:t>
+              <a:t>Late Fusion</a:t>
             </a:r>
           </a:p>
         </p:txBody>
@@ -26731,7 +26953,7 @@
                 <a:ea typeface="+mj-ea"/>
                 <a:cs typeface="+mj-cs"/>
               </a:rPr>
-              <a:t>Hybrid  Fusion</a:t>
+              <a:t>Hybrid Fusion</a:t>
             </a:r>
           </a:p>
         </p:txBody>
@@ -27386,7 +27608,7 @@
                 <a:ea typeface="+mj-ea"/>
                 <a:cs typeface="+mj-cs"/>
               </a:rPr>
-              <a:t>Data Representation:</a:t>
+              <a:t>Data Representation :</a:t>
             </a:r>
           </a:p>
         </p:txBody>
@@ -27587,8 +27809,20 @@
               <a:buNone/>
             </a:pPr>
             <a:r>
+              <a:rPr lang="es-AR" sz="2400" dirty="0"/>
+              <a:t>Vise à </a:t>
+            </a:r>
+            <a:r>
+              <a:rPr lang="es-AR" sz="2400" dirty="0" err="1"/>
+              <a:t>réduire</a:t>
+            </a:r>
+            <a:r>
+              <a:rPr lang="es-AR" sz="2400" dirty="0"/>
+              <a:t> </a:t>
+            </a:r>
+            <a:r>
               <a:rPr lang="fr-FR" sz="2100" dirty="0"/>
-              <a:t>A pour but de réduire l’hétérogénéité entres les modalités.</a:t>
+              <a:t>l’hétérogénéité entre les modalités.</a:t>
             </a:r>
           </a:p>
           <a:p>
@@ -29689,8 +29923,8 @@
         </p:nvSpPr>
         <p:spPr>
           <a:xfrm>
-            <a:off x="7155635" y="5666142"/>
-            <a:ext cx="3701441" cy="343235"/>
+            <a:off x="7138108" y="5666142"/>
+            <a:ext cx="3809890" cy="343235"/>
           </a:xfrm>
           <a:prstGeom prst="rect">
             <a:avLst/>
@@ -29722,7 +29956,7 @@
                 <a:ea typeface="+mn-ea"/>
                 <a:cs typeface="+mn-cs"/>
               </a:rPr>
-              <a:t>“</a:t>
+              <a:t>“ </a:t>
             </a:r>
             <a:r>
               <a:rPr lang="en-US" sz="1800" kern="1200" dirty="0">
@@ -29744,6 +29978,17 @@
               <a:t>court dans </a:t>
             </a:r>
             <a:r>
+              <a:rPr lang="en-US" sz="1800" kern="1200" dirty="0" err="1">
+                <a:highlight>
+                  <a:srgbClr val="FFFF00"/>
+                </a:highlight>
+                <a:latin typeface="+mn-lt"/>
+                <a:ea typeface="+mn-ea"/>
+                <a:cs typeface="+mn-cs"/>
+              </a:rPr>
+              <a:t>l’herbe</a:t>
+            </a:r>
+            <a:r>
               <a:rPr lang="en-US" sz="1800" kern="1200" dirty="0">
                 <a:highlight>
                   <a:srgbClr val="FFFF00"/>
@@ -29752,29 +29997,7 @@
                 <a:ea typeface="+mn-ea"/>
                 <a:cs typeface="+mn-cs"/>
               </a:rPr>
-              <a:t>l’ </a:t>
-            </a:r>
-            <a:r>
-              <a:rPr lang="en-US" sz="1800" kern="1200" dirty="0" err="1">
-                <a:highlight>
-                  <a:srgbClr val="FFFF00"/>
-                </a:highlight>
-                <a:latin typeface="+mn-lt"/>
-                <a:ea typeface="+mn-ea"/>
-                <a:cs typeface="+mn-cs"/>
-              </a:rPr>
-              <a:t>herbe</a:t>
-            </a:r>
-            <a:r>
-              <a:rPr lang="en-US" sz="1800" kern="1200" dirty="0">
-                <a:highlight>
-                  <a:srgbClr val="FFFF00"/>
-                </a:highlight>
-                <a:latin typeface="+mn-lt"/>
-                <a:ea typeface="+mn-ea"/>
-                <a:cs typeface="+mn-cs"/>
-              </a:rPr>
-              <a:t> verte</a:t>
+              <a:t> verte </a:t>
             </a:r>
             <a:r>
               <a:rPr lang="en-US" sz="1800" kern="1200" dirty="0">
@@ -30242,20 +30465,28 @@
           </a:lstStyle>
           <a:p>
             <a:r>
-              <a:rPr lang="fr-FR" dirty="0">
+              <a:rPr lang="es-AR" dirty="0" err="1">
                 <a:solidFill>
                   <a:schemeClr val="bg1"/>
                 </a:solidFill>
               </a:rPr>
-              <a:t>Structure d’</a:t>
-            </a:r>
-            <a:r>
-              <a:rPr lang="en-US" dirty="0">
+              <a:t>Structure</a:t>
+            </a:r>
+            <a:r>
+              <a:rPr lang="es-AR" dirty="0">
                 <a:solidFill>
                   <a:schemeClr val="bg1"/>
                 </a:solidFill>
               </a:rPr>
-              <a:t> Alignment</a:t>
+              <a:t> </a:t>
+            </a:r>
+            <a:r>
+              <a:rPr lang="es-AR" dirty="0" err="1">
+                <a:solidFill>
+                  <a:schemeClr val="bg1"/>
+                </a:solidFill>
+              </a:rPr>
+              <a:t>d’alignement</a:t>
             </a:r>
             <a:endParaRPr lang="fr-FR" dirty="0">
               <a:solidFill>
@@ -30298,7 +30529,7 @@
             </a:pPr>
             <a:r>
               <a:rPr lang="fr-FR" sz="2000" dirty="0"/>
-              <a:t>Il existe deux principales structures, l’alignement Discret et l’alignement continue:</a:t>
+              <a:t>Il existe deux principales structures, l’alignement discret et l’alignement continu :</a:t>
             </a:r>
           </a:p>
           <a:p>
@@ -30310,7 +30541,7 @@
           <a:p>
             <a:r>
               <a:rPr lang="fr-FR" sz="2000" b="1" dirty="0"/>
-              <a:t>L’alignement continue</a:t>
+              <a:t>L’alignement continu</a:t>
             </a:r>
           </a:p>
           <a:p>
@@ -31347,10 +31578,9 @@
           <a:lstStyle/>
           <a:p>
             <a:r>
-              <a:rPr lang="fr-FR" sz="4000"/>
-              <a:t>Sommaire:</a:t>
-            </a:r>
-            <a:endParaRPr lang="fr-FR" sz="4000" dirty="0"/>
+              <a:rPr lang="fr-FR" sz="4000" dirty="0"/>
+              <a:t>Sommaire :</a:t>
+            </a:r>
           </a:p>
         </p:txBody>
       </p:sp>
@@ -32021,13 +32251,34 @@
               <a:buChar char="•"/>
             </a:pPr>
             <a:r>
-              <a:rPr lang="fr-FR" dirty="0">
+              <a:rPr lang="es-AR" dirty="0" err="1">
                 <a:solidFill>
                   <a:schemeClr val="bg1"/>
                 </a:solidFill>
               </a:rPr>
-              <a:t>Transférer de connaissance</a:t>
-            </a:r>
+              <a:t>Transfert</a:t>
+            </a:r>
+            <a:r>
+              <a:rPr lang="es-AR" dirty="0">
+                <a:solidFill>
+                  <a:schemeClr val="bg1"/>
+                </a:solidFill>
+              </a:rPr>
+              <a:t> de </a:t>
+            </a:r>
+            <a:r>
+              <a:rPr lang="es-AR" dirty="0" err="1">
+                <a:solidFill>
+                  <a:schemeClr val="bg1"/>
+                </a:solidFill>
+              </a:rPr>
+              <a:t>connaissances</a:t>
+            </a:r>
+            <a:endParaRPr lang="es-AR" dirty="0">
+              <a:solidFill>
+                <a:schemeClr val="bg1"/>
+              </a:solidFill>
+            </a:endParaRPr>
           </a:p>
           <a:p>
             <a:pPr marL="285750" indent="-285750">
@@ -32101,7 +32352,7 @@
                   <a:schemeClr val="bg1"/>
                 </a:solidFill>
               </a:rPr>
-              <a:t>Flexibilité d'apprentissage</a:t>
+              <a:t>Flexibilité d’apprentissage</a:t>
             </a:r>
           </a:p>
         </p:txBody>
@@ -34181,7 +34432,7 @@
         </p:spPr>
         <p:txBody>
           <a:bodyPr vert="horz" lIns="91440" tIns="45720" rIns="91440" bIns="45720" rtlCol="0" anchor="ctr">
-            <a:normAutofit lnSpcReduction="10000"/>
+            <a:normAutofit fontScale="92500"/>
           </a:bodyPr>
           <a:lstStyle/>
           <a:p>
@@ -34260,7 +34511,7 @@
             </a:pPr>
             <a:r>
               <a:rPr lang="fr-FR" dirty="0"/>
-              <a:t>Déterminer où et comment fusionne.</a:t>
+              <a:t>Déterminer où et comment fusionner.</a:t>
             </a:r>
           </a:p>
           <a:p>
@@ -34270,7 +34521,7 @@
             </a:pPr>
             <a:r>
               <a:rPr lang="fr-FR" dirty="0"/>
-              <a:t>Trouver une structure qui maximise la performance tout en minimisant la perte d’info</a:t>
+              <a:t>Trouver une structure qui maximise la performance tout en minimisant la perte d’information</a:t>
             </a:r>
           </a:p>
           <a:p>
@@ -34918,7 +35169,7 @@
           <a:p>
             <a:r>
               <a:rPr lang="fr-FR" b="1" dirty="0"/>
-              <a:t>Solution possible :</a:t>
+              <a:t>Solutions possibles :</a:t>
             </a:r>
           </a:p>
           <a:p>
@@ -35534,15 +35785,15 @@
             </a:br>
             <a:r>
               <a:rPr lang="fr-FR" dirty="0"/>
-              <a:t>La plupart des travaux de fusion multimodale se limitent à deux modalités, car l’ajout de modalités supplémentaires augmente fortement la dimension des caractéristiques et introduit davantage de bruit, et rendant les calculs plus complexes. Pourtant, certains domaines comme la conduite autonome </a:t>
-            </a:r>
-            <a:r>
-              <a:rPr lang="fr-FR" dirty="0" err="1"/>
-              <a:t>necessite</a:t>
+              <a:t>La plupart des travaux de fusion multimodale se limitent à deux modalités, car l’ajout de modalités supplémentaires augmente fortement la dimension des caractéristiques et introduit davantage de bruit, et rend les calculs plus complexes. Pourtant, certains domaines comme la conduite autonome </a:t>
+            </a:r>
+            <a:r>
+              <a:rPr lang="es-AR" dirty="0" err="1"/>
+              <a:t>nécessitent</a:t>
             </a:r>
             <a:r>
               <a:rPr lang="fr-FR" dirty="0"/>
-              <a:t>, l’utilisation de plus de modalité.</a:t>
+              <a:t> l’utilisation de plus de modalités.</a:t>
             </a:r>
           </a:p>
           <a:p>
@@ -36875,7 +37126,7 @@
           <a:p>
             <a:r>
               <a:rPr lang="fr-FR" b="1" dirty="0"/>
-              <a:t>Défis:</a:t>
+              <a:t>Défis :</a:t>
             </a:r>
           </a:p>
           <a:p>
@@ -37510,14 +37761,14 @@
           <a:p>
             <a:r>
               <a:rPr lang="fr-FR" dirty="0"/>
-              <a:t>La synchronisation temporelle consiste à s’assurer que les données multimodales fusionnées sont correctement alignées dans le temps et dans l’espace. Pour les longues séquences il est difficile de capturer les associations sémantiques entre modalités. </a:t>
+              <a:t>La synchronisation temporelle consiste à s’assurer que les données multimodales fusionnées sont correctement alignées dans le temps et dans l’espace. Pour les longues séquences, il est difficile de capturer les associations sémantiques entre modalités. </a:t>
             </a:r>
             <a:endParaRPr lang="es-AR" dirty="0"/>
           </a:p>
           <a:p>
             <a:r>
               <a:rPr lang="fr-FR" dirty="0"/>
-              <a:t>La collecte des données multimodales peu présenter un désalignement dû au décalage temporel entre les capteurs. </a:t>
+              <a:t>La collecte des données multimodales peut présenter un désalignement dû au décalage temporel entre les capteurs. </a:t>
             </a:r>
           </a:p>
           <a:p>
@@ -37843,7 +38094,39 @@
             </a:r>
             <a:r>
               <a:rPr lang="es-AR" sz="1600" dirty="0" err="1"/>
-              <a:t>Rahatea</a:t>
+              <a:t>Rahate</a:t>
+            </a:r>
+            <a:r>
+              <a:rPr lang="es-AR" sz="1600" dirty="0"/>
+              <a:t>, </a:t>
+            </a:r>
+            <a:r>
+              <a:rPr lang="es-AR" sz="1600" dirty="0" err="1"/>
+              <a:t>Rahee</a:t>
+            </a:r>
+            <a:r>
+              <a:rPr lang="es-AR" sz="1600" dirty="0"/>
+              <a:t> </a:t>
+            </a:r>
+            <a:r>
+              <a:rPr lang="es-AR" sz="1600" dirty="0" err="1"/>
+              <a:t>Walambe</a:t>
+            </a:r>
+            <a:r>
+              <a:rPr lang="es-AR" sz="1600" dirty="0"/>
+              <a:t>, </a:t>
+            </a:r>
+            <a:r>
+              <a:rPr lang="es-AR" sz="1600" dirty="0" err="1"/>
+              <a:t>Sheela</a:t>
+            </a:r>
+            <a:r>
+              <a:rPr lang="es-AR" sz="1600" dirty="0"/>
+              <a:t> </a:t>
+            </a:r>
+            <a:r>
+              <a:rPr lang="es-AR" sz="1600" dirty="0" err="1"/>
+              <a:t>Ramanna</a:t>
             </a:r>
             <a:r>
               <a:rPr lang="es-AR" sz="1600" dirty="0"/>
@@ -37851,7 +38134,7 @@
             </a:r>
             <a:r>
               <a:rPr lang="es-AR" sz="1600" dirty="0" err="1"/>
-              <a:t>Rahee</a:t>
+              <a:t>Ketan</a:t>
             </a:r>
             <a:r>
               <a:rPr lang="es-AR" sz="1600" dirty="0"/>
@@ -37859,39 +38142,7 @@
             </a:r>
             <a:r>
               <a:rPr lang="es-AR" sz="1600" dirty="0" err="1"/>
-              <a:t>Walambea</a:t>
-            </a:r>
-            <a:r>
-              <a:rPr lang="es-AR" sz="1600" dirty="0"/>
-              <a:t>, b, </a:t>
-            </a:r>
-            <a:r>
-              <a:rPr lang="es-AR" sz="1600" dirty="0" err="1"/>
-              <a:t>Sheela</a:t>
-            </a:r>
-            <a:r>
-              <a:rPr lang="es-AR" sz="1600" dirty="0"/>
-              <a:t> </a:t>
-            </a:r>
-            <a:r>
-              <a:rPr lang="es-AR" sz="1600" dirty="0" err="1"/>
-              <a:t>Ramannac</a:t>
-            </a:r>
-            <a:r>
-              <a:rPr lang="es-AR" sz="1600" dirty="0"/>
-              <a:t> , </a:t>
-            </a:r>
-            <a:r>
-              <a:rPr lang="es-AR" sz="1600" dirty="0" err="1"/>
-              <a:t>Ketan</a:t>
-            </a:r>
-            <a:r>
-              <a:rPr lang="es-AR" sz="1600" dirty="0"/>
-              <a:t> </a:t>
-            </a:r>
-            <a:r>
-              <a:rPr lang="es-AR" sz="1600" dirty="0" err="1"/>
-              <a:t>Kotechaa</a:t>
+              <a:t>Kotecha</a:t>
             </a:r>
             <a:r>
               <a:rPr lang="es-AR" sz="1600" dirty="0"/>
@@ -37901,7 +38152,7 @@
           <a:p>
             <a:r>
               <a:rPr lang="es-AR" sz="1600" dirty="0">
-                <a:hlinkClick r:id="rId2">
+                <a:hlinkClick r:id="rId3">
                   <a:extLst>
                     <a:ext uri="{A12FA001-AC4F-418D-AE19-62706E023703}">
                       <ahyp:hlinkClr xmlns:ahyp="http://schemas.microsoft.com/office/drawing/2018/hyperlinkcolor" val="tx"/>
@@ -37909,18 +38160,59 @@
                   </a:extLst>
                 </a:hlinkClick>
               </a:rPr>
-              <a:t>https://www.youtube.com/watch?v=kixc1mh55yY</a:t>
+              <a:t>https://www.youtube.com/@paulliang279</a:t>
+            </a:r>
+            <a:r>
+              <a:rPr lang="es-AR" sz="1600" dirty="0"/>
+              <a:t> </a:t>
+            </a:r>
+            <a:r>
+              <a:rPr lang="en-US" sz="1600" dirty="0"/>
+              <a:t>Paul Liang, Assistant Professor at the MIT Media Lab and MIT EECS</a:t>
             </a:r>
             <a:endParaRPr lang="es-AR" sz="1600" dirty="0"/>
           </a:p>
           <a:p>
             <a:r>
+              <a:rPr lang="es-AR" sz="1600" dirty="0">
+                <a:hlinkClick r:id="rId4">
+                  <a:extLst>
+                    <a:ext uri="{A12FA001-AC4F-418D-AE19-62706E023703}">
+                      <ahyp:hlinkClr xmlns:ahyp="http://schemas.microsoft.com/office/drawing/2018/hyperlinkcolor" val="tx"/>
+                    </a:ext>
+                  </a:extLst>
+                </a:hlinkClick>
+              </a:rPr>
+              <a:t>https://www.youtube.com/@LPMorency</a:t>
+            </a:r>
+            <a:r>
               <a:rPr lang="es-AR" sz="1600" dirty="0"/>
-              <a:t>https://www.youtube.com/watch?v=xcOMHwjNLaA</a:t>
-            </a:r>
-          </a:p>
-          <a:p>
-            <a:endParaRPr lang="es-AR" sz="1600" dirty="0"/>
+              <a:t>  Louis-Philippe </a:t>
+            </a:r>
+            <a:r>
+              <a:rPr lang="es-AR" sz="1600" dirty="0" err="1"/>
+              <a:t>Morency</a:t>
+            </a:r>
+            <a:r>
+              <a:rPr lang="es-AR" sz="1600" dirty="0"/>
+              <a:t>, </a:t>
+            </a:r>
+            <a:r>
+              <a:rPr lang="es-AR" sz="1600" dirty="0" err="1"/>
+              <a:t>associate</a:t>
+            </a:r>
+            <a:r>
+              <a:rPr lang="es-AR" sz="1600" dirty="0"/>
+              <a:t> </a:t>
+            </a:r>
+            <a:r>
+              <a:rPr lang="es-AR" sz="1600" dirty="0" err="1"/>
+              <a:t>professor</a:t>
+            </a:r>
+            <a:r>
+              <a:rPr lang="es-AR" sz="1600" dirty="0"/>
+              <a:t> at CMU</a:t>
+            </a:r>
           </a:p>
         </p:txBody>
       </p:sp>
@@ -39504,7 +39796,7 @@
             <p:ph idx="1"/>
             <p:extLst>
               <p:ext uri="{D42A27DB-BD31-4B8C-83A1-F6EECF244321}">
-                <p14:modId xmlns:p14="http://schemas.microsoft.com/office/powerpoint/2010/main" val="4244169258"/>
+                <p14:modId xmlns:p14="http://schemas.microsoft.com/office/powerpoint/2010/main" val="2063622091"/>
               </p:ext>
             </p:extLst>
           </p:nvPr>
@@ -41408,16 +41700,29 @@
           <a:lstStyle/>
           <a:p>
             <a:r>
-              <a:rPr lang="en-US" sz="4000" kern="1200" dirty="0">
+              <a:rPr lang="es-AR" sz="4000" dirty="0" err="1">
                 <a:solidFill>
-                  <a:srgbClr val="FFFFFF"/>
+                  <a:schemeClr val="bg1"/>
                 </a:solidFill>
-                <a:latin typeface="+mj-lt"/>
-                <a:ea typeface="+mj-ea"/>
-                <a:cs typeface="+mj-cs"/>
               </a:rPr>
-              <a:t>Model unimodal </a:t>
-            </a:r>
+              <a:t>Modèle</a:t>
+            </a:r>
+            <a:r>
+              <a:rPr lang="es-AR" sz="4000" dirty="0">
+                <a:solidFill>
+                  <a:schemeClr val="bg1"/>
+                </a:solidFill>
+              </a:rPr>
+              <a:t> unimodal</a:t>
+            </a:r>
+            <a:endParaRPr lang="en-US" sz="4000" kern="1200" dirty="0">
+              <a:solidFill>
+                <a:schemeClr val="bg1"/>
+              </a:solidFill>
+              <a:latin typeface="+mj-lt"/>
+              <a:ea typeface="+mj-ea"/>
+              <a:cs typeface="+mj-cs"/>
+            </a:endParaRPr>
           </a:p>
         </p:txBody>
       </p:sp>
